--- a/textbook/ppt/chapter12_ppt.pptx
+++ b/textbook/ppt/chapter12_ppt.pptx
@@ -7,6 +7,12 @@
   <p:sldIdLst>
     <p:sldId id="256" r:id="rId7"/>
     <p:sldId id="257" r:id="rId8"/>
+    <p:sldId id="258" r:id="rId9"/>
+    <p:sldId id="259" r:id="rId10"/>
+    <p:sldId id="260" r:id="rId11"/>
+    <p:sldId id="261" r:id="rId12"/>
+    <p:sldId id="262" r:id="rId13"/>
+    <p:sldId id="263" r:id="rId14"/>
   </p:sldIdLst>
   <p:sldSz cx="12188952" cy="6858000" type="screen4x3"/>
   <p:notesSz cx="6858000" cy="9144000"/>
@@ -3235,6 +3241,632 @@
             <a:r>
               <a:rPr sz="1800"/>
               <a:t>• 并查集的基本概念与应用</a:t>
+            </a:r>
+          </a:p>
+        </p:txBody>
+      </p:sp>
+    </p:spTree>
+  </p:cSld>
+  <p:clrMapOvr>
+    <a:masterClrMapping/>
+  </p:clrMapOvr>
+</p:sld>
+</file>
+
+<file path=ppt/slides/slide3.xml><?xml version="1.0" encoding="utf-8"?>
+<p:sld xmlns:a="http://schemas.openxmlformats.org/drawingml/2006/main" xmlns:p="http://schemas.openxmlformats.org/presentationml/2006/main" xmlns:r="http://schemas.openxmlformats.org/officeDocument/2006/relationships">
+  <p:cSld>
+    <p:spTree>
+      <p:nvGrpSpPr>
+        <p:cNvPr id="1" name=""/>
+        <p:cNvGrpSpPr/>
+        <p:nvPr/>
+      </p:nvGrpSpPr>
+      <p:grpSpPr/>
+      <p:sp>
+        <p:nvSpPr>
+          <p:cNvPr id="2" name="TextBox 1"/>
+          <p:cNvSpPr txBox="1"/>
+          <p:nvPr/>
+        </p:nvSpPr>
+        <p:spPr>
+          <a:xfrm>
+            <a:off x="914400" y="457200"/>
+            <a:ext cx="10058400" cy="914400"/>
+          </a:xfrm>
+          <a:prstGeom prst="rect">
+            <a:avLst/>
+          </a:prstGeom>
+          <a:noFill/>
+        </p:spPr>
+        <p:txBody>
+          <a:bodyPr wrap="none">
+            <a:spAutoFit/>
+          </a:bodyPr>
+          <a:lstStyle/>
+          <a:p>
+            <a:r>
+              <a:rPr sz="2800" b="1">
+                <a:solidFill>
+                  <a:srgbClr val="8B0000"/>
+                </a:solidFill>
+              </a:rPr>
+              <a:t>本章概览</a:t>
+            </a:r>
+          </a:p>
+        </p:txBody>
+      </p:sp>
+      <p:sp>
+        <p:nvSpPr>
+          <p:cNvPr id="3" name="TextBox 2"/>
+          <p:cNvSpPr txBox="1"/>
+          <p:nvPr/>
+        </p:nvSpPr>
+        <p:spPr>
+          <a:xfrm>
+            <a:off x="914400" y="1371600"/>
+            <a:ext cx="10058400" cy="5029200"/>
+          </a:xfrm>
+          <a:prstGeom prst="rect">
+            <a:avLst/>
+          </a:prstGeom>
+          <a:noFill/>
+        </p:spPr>
+        <p:txBody>
+          <a:bodyPr wrap="none">
+            <a:spAutoFit/>
+          </a:bodyPr>
+          <a:lstStyle/>
+          <a:p/>
+          <a:p>
+            <a:r>
+              <a:rPr sz="1600">
+                <a:solidFill>
+                  <a:srgbClr val="000000"/>
+                </a:solidFill>
+              </a:rPr>
+              <a:t>单调栈：维护单调递增/递减的栈</a:t>
+            </a:r>
+          </a:p>
+          <a:p>
+            <a:r>
+              <a:rPr sz="1600">
+                <a:solidFill>
+                  <a:srgbClr val="000000"/>
+                </a:solidFill>
+              </a:rPr>
+              <a:t>KMP：next数组，匹配时利用最长前后缀</a:t>
+            </a:r>
+          </a:p>
+          <a:p>
+            <a:r>
+              <a:rPr sz="1600">
+                <a:solidFill>
+                  <a:srgbClr val="000000"/>
+                </a:solidFill>
+              </a:rPr>
+              <a:t>堆：完全二叉树，插入O(logn)，取最值O(1)</a:t>
+            </a:r>
+          </a:p>
+          <a:p>
+            <a:r>
+              <a:rPr sz="1600">
+                <a:solidFill>
+                  <a:srgbClr val="000000"/>
+                </a:solidFill>
+              </a:rPr>
+              <a:t>并查集：合并集合+查询连通</a:t>
+            </a:r>
+          </a:p>
+        </p:txBody>
+      </p:sp>
+    </p:spTree>
+  </p:cSld>
+  <p:clrMapOvr>
+    <a:masterClrMapping/>
+  </p:clrMapOvr>
+</p:sld>
+</file>
+
+<file path=ppt/slides/slide4.xml><?xml version="1.0" encoding="utf-8"?>
+<p:sld xmlns:a="http://schemas.openxmlformats.org/drawingml/2006/main" xmlns:p="http://schemas.openxmlformats.org/presentationml/2006/main" xmlns:r="http://schemas.openxmlformats.org/officeDocument/2006/relationships">
+  <p:cSld>
+    <p:spTree>
+      <p:nvGrpSpPr>
+        <p:cNvPr id="1" name=""/>
+        <p:cNvGrpSpPr/>
+        <p:nvPr/>
+      </p:nvGrpSpPr>
+      <p:grpSpPr/>
+      <p:sp>
+        <p:nvSpPr>
+          <p:cNvPr id="2" name="TextBox 1"/>
+          <p:cNvSpPr txBox="1"/>
+          <p:nvPr/>
+        </p:nvSpPr>
+        <p:spPr>
+          <a:xfrm>
+            <a:off x="914400" y="457200"/>
+            <a:ext cx="10058400" cy="914400"/>
+          </a:xfrm>
+          <a:prstGeom prst="rect">
+            <a:avLst/>
+          </a:prstGeom>
+          <a:noFill/>
+        </p:spPr>
+        <p:txBody>
+          <a:bodyPr wrap="none">
+            <a:spAutoFit/>
+          </a:bodyPr>
+          <a:lstStyle/>
+          <a:p>
+            <a:r>
+              <a:rPr sz="2800" b="1">
+                <a:solidFill>
+                  <a:srgbClr val="8B0000"/>
+                </a:solidFill>
+              </a:rPr>
+              <a:t>C++ 代码示例</a:t>
+            </a:r>
+          </a:p>
+        </p:txBody>
+      </p:sp>
+      <p:sp>
+        <p:nvSpPr>
+          <p:cNvPr id="3" name="TextBox 2"/>
+          <p:cNvSpPr txBox="1"/>
+          <p:nvPr/>
+        </p:nvSpPr>
+        <p:spPr>
+          <a:xfrm>
+            <a:off x="914400" y="1371600"/>
+            <a:ext cx="10058400" cy="5029200"/>
+          </a:xfrm>
+          <a:prstGeom prst="rect">
+            <a:avLst/>
+          </a:prstGeom>
+          <a:noFill/>
+        </p:spPr>
+        <p:txBody>
+          <a:bodyPr wrap="none">
+            <a:spAutoFit/>
+          </a:bodyPr>
+          <a:lstStyle/>
+          <a:p/>
+          <a:p>
+            <a:r>
+              <a:rPr sz="1400">
+                <a:solidFill>
+                  <a:srgbClr val="000000"/>
+                </a:solidFill>
+              </a:rPr>
+              <a:t>int find(int x) {
+    if (p[x] != x) p[x] = find(p[x]);
+    return p[x];
+}</a:t>
+            </a:r>
+          </a:p>
+        </p:txBody>
+      </p:sp>
+    </p:spTree>
+  </p:cSld>
+  <p:clrMapOvr>
+    <a:masterClrMapping/>
+  </p:clrMapOvr>
+</p:sld>
+</file>
+
+<file path=ppt/slides/slide5.xml><?xml version="1.0" encoding="utf-8"?>
+<p:sld xmlns:a="http://schemas.openxmlformats.org/drawingml/2006/main" xmlns:p="http://schemas.openxmlformats.org/presentationml/2006/main" xmlns:r="http://schemas.openxmlformats.org/officeDocument/2006/relationships">
+  <p:cSld>
+    <p:spTree>
+      <p:nvGrpSpPr>
+        <p:cNvPr id="1" name=""/>
+        <p:cNvGrpSpPr/>
+        <p:nvPr/>
+      </p:nvGrpSpPr>
+      <p:grpSpPr/>
+      <p:sp>
+        <p:nvSpPr>
+          <p:cNvPr id="2" name="TextBox 1"/>
+          <p:cNvSpPr txBox="1"/>
+          <p:nvPr/>
+        </p:nvSpPr>
+        <p:spPr>
+          <a:xfrm>
+            <a:off x="914400" y="457200"/>
+            <a:ext cx="10058400" cy="914400"/>
+          </a:xfrm>
+          <a:prstGeom prst="rect">
+            <a:avLst/>
+          </a:prstGeom>
+          <a:noFill/>
+        </p:spPr>
+        <p:txBody>
+          <a:bodyPr wrap="none">
+            <a:spAutoFit/>
+          </a:bodyPr>
+          <a:lstStyle/>
+          <a:p>
+            <a:r>
+              <a:rPr sz="2800" b="1">
+                <a:solidFill>
+                  <a:srgbClr val="8B0000"/>
+                </a:solidFill>
+              </a:rPr>
+              <a:t>Python 代码示例</a:t>
+            </a:r>
+          </a:p>
+        </p:txBody>
+      </p:sp>
+      <p:sp>
+        <p:nvSpPr>
+          <p:cNvPr id="3" name="TextBox 2"/>
+          <p:cNvSpPr txBox="1"/>
+          <p:nvPr/>
+        </p:nvSpPr>
+        <p:spPr>
+          <a:xfrm>
+            <a:off x="914400" y="1371600"/>
+            <a:ext cx="10058400" cy="5029200"/>
+          </a:xfrm>
+          <a:prstGeom prst="rect">
+            <a:avLst/>
+          </a:prstGeom>
+          <a:noFill/>
+        </p:spPr>
+        <p:txBody>
+          <a:bodyPr wrap="none">
+            <a:spAutoFit/>
+          </a:bodyPr>
+          <a:lstStyle/>
+          <a:p/>
+          <a:p>
+            <a:r>
+              <a:rPr sz="1400">
+                <a:solidFill>
+                  <a:srgbClr val="000000"/>
+                </a:solidFill>
+              </a:rPr>
+              <a:t>def find(x):
+    if p[x] != x:
+        p[x] = find(p[x])
+    return p[x]</a:t>
+            </a:r>
+          </a:p>
+        </p:txBody>
+      </p:sp>
+    </p:spTree>
+  </p:cSld>
+  <p:clrMapOvr>
+    <a:masterClrMapping/>
+  </p:clrMapOvr>
+</p:sld>
+</file>
+
+<file path=ppt/slides/slide6.xml><?xml version="1.0" encoding="utf-8"?>
+<p:sld xmlns:a="http://schemas.openxmlformats.org/drawingml/2006/main" xmlns:p="http://schemas.openxmlformats.org/presentationml/2006/main" xmlns:r="http://schemas.openxmlformats.org/officeDocument/2006/relationships">
+  <p:cSld>
+    <p:spTree>
+      <p:nvGrpSpPr>
+        <p:cNvPr id="1" name=""/>
+        <p:cNvGrpSpPr/>
+        <p:nvPr/>
+      </p:nvGrpSpPr>
+      <p:grpSpPr/>
+      <p:sp>
+        <p:nvSpPr>
+          <p:cNvPr id="2" name="TextBox 1"/>
+          <p:cNvSpPr txBox="1"/>
+          <p:nvPr/>
+        </p:nvSpPr>
+        <p:spPr>
+          <a:xfrm>
+            <a:off x="914400" y="457200"/>
+            <a:ext cx="10058400" cy="914400"/>
+          </a:xfrm>
+          <a:prstGeom prst="rect">
+            <a:avLst/>
+          </a:prstGeom>
+          <a:noFill/>
+        </p:spPr>
+        <p:txBody>
+          <a:bodyPr wrap="none">
+            <a:spAutoFit/>
+          </a:bodyPr>
+          <a:lstStyle/>
+          <a:p>
+            <a:r>
+              <a:rPr sz="2800" b="1">
+                <a:solidFill>
+                  <a:srgbClr val="8B0000"/>
+                </a:solidFill>
+              </a:rPr>
+              <a:t>常见错误</a:t>
+            </a:r>
+          </a:p>
+        </p:txBody>
+      </p:sp>
+      <p:sp>
+        <p:nvSpPr>
+          <p:cNvPr id="3" name="TextBox 2"/>
+          <p:cNvSpPr txBox="1"/>
+          <p:nvPr/>
+        </p:nvSpPr>
+        <p:spPr>
+          <a:xfrm>
+            <a:off x="914400" y="1371600"/>
+            <a:ext cx="10058400" cy="5029200"/>
+          </a:xfrm>
+          <a:prstGeom prst="rect">
+            <a:avLst/>
+          </a:prstGeom>
+          <a:noFill/>
+        </p:spPr>
+        <p:txBody>
+          <a:bodyPr wrap="none">
+            <a:spAutoFit/>
+          </a:bodyPr>
+          <a:lstStyle/>
+          <a:p/>
+          <a:p>
+            <a:r>
+              <a:rPr sz="1600">
+                <a:solidFill>
+                  <a:srgbClr val="000000"/>
+                </a:solidFill>
+              </a:rPr>
+              <a:t>单调栈忘记处理栈空的情况</a:t>
+            </a:r>
+          </a:p>
+          <a:p>
+            <a:r>
+              <a:rPr sz="1600">
+                <a:solidFill>
+                  <a:srgbClr val="000000"/>
+                </a:solidFill>
+              </a:rPr>
+              <a:t>KMP的next数组初始化</a:t>
+            </a:r>
+          </a:p>
+          <a:p>
+            <a:r>
+              <a:rPr sz="1600">
+                <a:solidFill>
+                  <a:srgbClr val="000000"/>
+                </a:solidFill>
+              </a:rPr>
+              <a:t>堆的下标从1还是0开始</a:t>
+            </a:r>
+          </a:p>
+          <a:p>
+            <a:r>
+              <a:rPr sz="1600">
+                <a:solidFill>
+                  <a:srgbClr val="000000"/>
+                </a:solidFill>
+              </a:rPr>
+              <a:t>并查集路径压缩</a:t>
+            </a:r>
+          </a:p>
+        </p:txBody>
+      </p:sp>
+    </p:spTree>
+  </p:cSld>
+  <p:clrMapOvr>
+    <a:masterClrMapping/>
+  </p:clrMapOvr>
+</p:sld>
+</file>
+
+<file path=ppt/slides/slide7.xml><?xml version="1.0" encoding="utf-8"?>
+<p:sld xmlns:a="http://schemas.openxmlformats.org/drawingml/2006/main" xmlns:p="http://schemas.openxmlformats.org/presentationml/2006/main" xmlns:r="http://schemas.openxmlformats.org/officeDocument/2006/relationships">
+  <p:cSld>
+    <p:spTree>
+      <p:nvGrpSpPr>
+        <p:cNvPr id="1" name=""/>
+        <p:cNvGrpSpPr/>
+        <p:nvPr/>
+      </p:nvGrpSpPr>
+      <p:grpSpPr/>
+      <p:sp>
+        <p:nvSpPr>
+          <p:cNvPr id="2" name="TextBox 1"/>
+          <p:cNvSpPr txBox="1"/>
+          <p:nvPr/>
+        </p:nvSpPr>
+        <p:spPr>
+          <a:xfrm>
+            <a:off x="914400" y="457200"/>
+            <a:ext cx="10058400" cy="914400"/>
+          </a:xfrm>
+          <a:prstGeom prst="rect">
+            <a:avLst/>
+          </a:prstGeom>
+          <a:noFill/>
+        </p:spPr>
+        <p:txBody>
+          <a:bodyPr wrap="none">
+            <a:spAutoFit/>
+          </a:bodyPr>
+          <a:lstStyle/>
+          <a:p>
+            <a:r>
+              <a:rPr sz="2800" b="1">
+                <a:solidFill>
+                  <a:srgbClr val="8B0000"/>
+                </a:solidFill>
+              </a:rPr>
+              <a:t>练习题目</a:t>
+            </a:r>
+          </a:p>
+        </p:txBody>
+      </p:sp>
+      <p:sp>
+        <p:nvSpPr>
+          <p:cNvPr id="3" name="TextBox 2"/>
+          <p:cNvSpPr txBox="1"/>
+          <p:nvPr/>
+        </p:nvSpPr>
+        <p:spPr>
+          <a:xfrm>
+            <a:off x="914400" y="1371600"/>
+            <a:ext cx="10058400" cy="5029200"/>
+          </a:xfrm>
+          <a:prstGeom prst="rect">
+            <a:avLst/>
+          </a:prstGeom>
+          <a:noFill/>
+        </p:spPr>
+        <p:txBody>
+          <a:bodyPr wrap="none">
+            <a:spAutoFit/>
+          </a:bodyPr>
+          <a:lstStyle/>
+          <a:p/>
+          <a:p>
+            <a:r>
+              <a:rPr sz="1600">
+                <a:solidFill>
+                  <a:srgbClr val="000000"/>
+                </a:solidFill>
+              </a:rPr>
+              <a:t>JD130 铁链串珠</a:t>
+            </a:r>
+          </a:p>
+          <a:p>
+            <a:r>
+              <a:rPr sz="1600">
+                <a:solidFill>
+                  <a:srgbClr val="000000"/>
+                </a:solidFill>
+              </a:rPr>
+              <a:t>JD134 一山更比</a:t>
+            </a:r>
+          </a:p>
+          <a:p>
+            <a:r>
+              <a:rPr sz="1600">
+                <a:solidFill>
+                  <a:srgbClr val="000000"/>
+                </a:solidFill>
+              </a:rPr>
+              <a:t>JD138 合帮并派</a:t>
+            </a:r>
+          </a:p>
+        </p:txBody>
+      </p:sp>
+    </p:spTree>
+  </p:cSld>
+  <p:clrMapOvr>
+    <a:masterClrMapping/>
+  </p:clrMapOvr>
+</p:sld>
+</file>
+
+<file path=ppt/slides/slide8.xml><?xml version="1.0" encoding="utf-8"?>
+<p:sld xmlns:a="http://schemas.openxmlformats.org/drawingml/2006/main" xmlns:p="http://schemas.openxmlformats.org/presentationml/2006/main" xmlns:r="http://schemas.openxmlformats.org/officeDocument/2006/relationships">
+  <p:cSld>
+    <p:spTree>
+      <p:nvGrpSpPr>
+        <p:cNvPr id="1" name=""/>
+        <p:cNvGrpSpPr/>
+        <p:nvPr/>
+      </p:nvGrpSpPr>
+      <p:grpSpPr/>
+      <p:sp>
+        <p:nvSpPr>
+          <p:cNvPr id="2" name="TextBox 1"/>
+          <p:cNvSpPr txBox="1"/>
+          <p:nvPr/>
+        </p:nvSpPr>
+        <p:spPr>
+          <a:xfrm>
+            <a:off x="914400" y="457200"/>
+            <a:ext cx="10058400" cy="914400"/>
+          </a:xfrm>
+          <a:prstGeom prst="rect">
+            <a:avLst/>
+          </a:prstGeom>
+          <a:noFill/>
+        </p:spPr>
+        <p:txBody>
+          <a:bodyPr wrap="none">
+            <a:spAutoFit/>
+          </a:bodyPr>
+          <a:lstStyle/>
+          <a:p>
+            <a:r>
+              <a:rPr sz="2800" b="1">
+                <a:solidFill>
+                  <a:srgbClr val="8B0000"/>
+                </a:solidFill>
+              </a:rPr>
+              <a:t>本章小结</a:t>
+            </a:r>
+          </a:p>
+        </p:txBody>
+      </p:sp>
+      <p:sp>
+        <p:nvSpPr>
+          <p:cNvPr id="3" name="TextBox 2"/>
+          <p:cNvSpPr txBox="1"/>
+          <p:nvPr/>
+        </p:nvSpPr>
+        <p:spPr>
+          <a:xfrm>
+            <a:off x="914400" y="1371600"/>
+            <a:ext cx="10058400" cy="5029200"/>
+          </a:xfrm>
+          <a:prstGeom prst="rect">
+            <a:avLst/>
+          </a:prstGeom>
+          <a:noFill/>
+        </p:spPr>
+        <p:txBody>
+          <a:bodyPr wrap="none">
+            <a:spAutoFit/>
+          </a:bodyPr>
+          <a:lstStyle/>
+          <a:p/>
+          <a:p>
+            <a:r>
+              <a:rPr sz="1600">
+                <a:solidFill>
+                  <a:srgbClr val="000000"/>
+                </a:solidFill>
+              </a:rPr>
+              <a:t>掌握核心概念</a:t>
+            </a:r>
+          </a:p>
+          <a:p>
+            <a:r>
+              <a:rPr sz="1600">
+                <a:solidFill>
+                  <a:srgbClr val="000000"/>
+                </a:solidFill>
+              </a:rPr>
+              <a:t>多做练习</a:t>
+            </a:r>
+          </a:p>
+          <a:p>
+            <a:r>
+              <a:rPr sz="1600">
+                <a:solidFill>
+                  <a:srgbClr val="000000"/>
+                </a:solidFill>
+              </a:rPr>
+              <a:t>注意边界条件</a:t>
+            </a:r>
+          </a:p>
+          <a:p>
+            <a:r>
+              <a:rPr sz="1600">
+                <a:solidFill>
+                  <a:srgbClr val="000000"/>
+                </a:solidFill>
+              </a:rPr>
+              <a:t>理解算法思想而非死记代码</a:t>
             </a:r>
           </a:p>
         </p:txBody>

--- a/textbook/ppt/chapter12_ppt.pptx
+++ b/textbook/ppt/chapter12_ppt.pptx
@@ -12,7 +12,6 @@
     <p:sldId id="260" r:id="rId11"/>
     <p:sldId id="261" r:id="rId12"/>
     <p:sldId id="262" r:id="rId13"/>
-    <p:sldId id="263" r:id="rId14"/>
   </p:sldIdLst>
   <p:sldSz cx="12188952" cy="6858000" type="screen4x3"/>
   <p:notesSz cx="6858000" cy="9144000"/>
@@ -3124,18 +3123,7 @@
                   <a:srgbClr val="8B0000"/>
                 </a:solidFill>
               </a:rPr>
-              <a:t>第12章 利器出鞘</a:t>
-            </a:r>
-          </a:p>
-          <a:p>
-            <a:pPr algn="ctr"/>
-            <a:r>
-              <a:rPr sz="2400">
-                <a:solidFill>
-                  <a:srgbClr val="6B5D4D"/>
-                </a:solidFill>
-              </a:rPr>
-              <a:t>进阶数据结构</a:t>
+              <a:t>第12章</a:t>
             </a:r>
           </a:p>
         </p:txBody>
@@ -3166,8 +3154,8 @@
         </p:nvSpPr>
         <p:spPr>
           <a:xfrm>
-            <a:off x="914400" y="457200"/>
-            <a:ext cx="10058400" cy="914400"/>
+            <a:off x="457200" y="274320"/>
+            <a:ext cx="10972800" cy="731520"/>
           </a:xfrm>
           <a:prstGeom prst="rect">
             <a:avLst/>
@@ -3181,7 +3169,7 @@
           <a:lstStyle/>
           <a:p>
             <a:r>
-              <a:rPr sz="2800" b="1">
+              <a:rPr sz="2400" b="1">
                 <a:solidFill>
                   <a:srgbClr val="8B0000"/>
                 </a:solidFill>
@@ -3199,8 +3187,8 @@
         </p:nvSpPr>
         <p:spPr>
           <a:xfrm>
-            <a:off x="914400" y="1371600"/>
-            <a:ext cx="10058400" cy="4572000"/>
+            <a:off x="457200" y="1097280"/>
+            <a:ext cx="10972800" cy="5029200"/>
           </a:xfrm>
           <a:prstGeom prst="rect">
             <a:avLst/>
@@ -3215,32 +3203,42 @@
           <a:p/>
           <a:p>
             <a:r>
-              <a:rPr sz="1800"/>
-              <a:t>• 单调栈的基本概念与应用</a:t>
-            </a:r>
-          </a:p>
-          <a:p>
-            <a:r>
-              <a:rPr sz="1800"/>
-              <a:t>• 单调队列的基本概念与应用</a:t>
-            </a:r>
-          </a:p>
-          <a:p>
-            <a:r>
-              <a:rPr sz="1800"/>
-              <a:t>• KMP算法的基本概念与应用</a:t>
-            </a:r>
-          </a:p>
-          <a:p>
-            <a:r>
-              <a:rPr sz="1800"/>
-              <a:t>• 堆的基本概念与应用</a:t>
-            </a:r>
-          </a:p>
-          <a:p>
-            <a:r>
-              <a:rPr sz="1800"/>
-              <a:t>• 并查集的基本概念与应用</a:t>
+              <a:rPr sz="1400">
+                <a:solidFill>
+                  <a:srgbClr val="000000"/>
+                </a:solidFill>
+              </a:rPr>
+              <a:t>单调栈：维护单调递增/递减的栈，O(n)</a:t>
+            </a:r>
+          </a:p>
+          <a:p>
+            <a:r>
+              <a:rPr sz="1400">
+                <a:solidFill>
+                  <a:srgbClr val="000000"/>
+                </a:solidFill>
+              </a:rPr>
+              <a:t>单调队列：滑动窗口最大/最小值，O(n)</a:t>
+            </a:r>
+          </a:p>
+          <a:p>
+            <a:r>
+              <a:rPr sz="1400">
+                <a:solidFill>
+                  <a:srgbClr val="000000"/>
+                </a:solidFill>
+              </a:rPr>
+              <a:t>KMP：next数组，匹配时利用最长前后缀</a:t>
+            </a:r>
+          </a:p>
+          <a:p>
+            <a:r>
+              <a:rPr sz="1400">
+                <a:solidFill>
+                  <a:srgbClr val="000000"/>
+                </a:solidFill>
+              </a:rPr>
+              <a:t>并查集：合并集合+查询连通，路径压缩+按秩合并</a:t>
             </a:r>
           </a:p>
         </p:txBody>
@@ -3271,8 +3269,8 @@
         </p:nvSpPr>
         <p:spPr>
           <a:xfrm>
-            <a:off x="914400" y="457200"/>
-            <a:ext cx="10058400" cy="914400"/>
+            <a:off x="457200" y="274320"/>
+            <a:ext cx="10972800" cy="731520"/>
           </a:xfrm>
           <a:prstGeom prst="rect">
             <a:avLst/>
@@ -3286,12 +3284,12 @@
           <a:lstStyle/>
           <a:p>
             <a:r>
-              <a:rPr sz="2800" b="1">
+              <a:rPr sz="2400" b="1">
                 <a:solidFill>
                   <a:srgbClr val="8B0000"/>
                 </a:solidFill>
               </a:rPr>
-              <a:t>本章概览</a:t>
+              <a:t>C++ 代码示例</a:t>
             </a:r>
           </a:p>
         </p:txBody>
@@ -3304,8 +3302,8 @@
         </p:nvSpPr>
         <p:spPr>
           <a:xfrm>
-            <a:off x="914400" y="1371600"/>
-            <a:ext cx="10058400" cy="5029200"/>
+            <a:off x="457200" y="1097280"/>
+            <a:ext cx="10972800" cy="5029200"/>
           </a:xfrm>
           <a:prstGeom prst="rect">
             <a:avLst/>
@@ -3320,42 +3318,19 @@
           <a:p/>
           <a:p>
             <a:r>
-              <a:rPr sz="1600">
+              <a:rPr sz="1200">
                 <a:solidFill>
                   <a:srgbClr val="000000"/>
                 </a:solidFill>
               </a:rPr>
-              <a:t>单调栈：维护单调递增/递减的栈</a:t>
-            </a:r>
-          </a:p>
-          <a:p>
-            <a:r>
-              <a:rPr sz="1600">
-                <a:solidFill>
-                  <a:srgbClr val="000000"/>
-                </a:solidFill>
-              </a:rPr>
-              <a:t>KMP：next数组，匹配时利用最长前后缀</a:t>
-            </a:r>
-          </a:p>
-          <a:p>
-            <a:r>
-              <a:rPr sz="1600">
-                <a:solidFill>
-                  <a:srgbClr val="000000"/>
-                </a:solidFill>
-              </a:rPr>
-              <a:t>堆：完全二叉树，插入O(logn)，取最值O(1)</a:t>
-            </a:r>
-          </a:p>
-          <a:p>
-            <a:r>
-              <a:rPr sz="1600">
-                <a:solidFill>
-                  <a:srgbClr val="000000"/>
-                </a:solidFill>
-              </a:rPr>
-              <a:t>并查集：合并集合+查询连通</a:t>
+              <a:t>// 并查集
+int find(int x) {
+    if (p[x] != x) p[x] = find(p[x]);
+    return p[x];
+}
+void merge(int a, int b) {
+    p[find(a)] = find(b);
+}</a:t>
             </a:r>
           </a:p>
         </p:txBody>
@@ -3386,8 +3361,8 @@
         </p:nvSpPr>
         <p:spPr>
           <a:xfrm>
-            <a:off x="914400" y="457200"/>
-            <a:ext cx="10058400" cy="914400"/>
+            <a:off x="457200" y="274320"/>
+            <a:ext cx="10972800" cy="731520"/>
           </a:xfrm>
           <a:prstGeom prst="rect">
             <a:avLst/>
@@ -3401,12 +3376,12 @@
           <a:lstStyle/>
           <a:p>
             <a:r>
-              <a:rPr sz="2800" b="1">
+              <a:rPr sz="2400" b="1">
                 <a:solidFill>
                   <a:srgbClr val="8B0000"/>
                 </a:solidFill>
               </a:rPr>
-              <a:t>C++ 代码示例</a:t>
+              <a:t>Python 代码示例</a:t>
             </a:r>
           </a:p>
         </p:txBody>
@@ -3419,8 +3394,8 @@
         </p:nvSpPr>
         <p:spPr>
           <a:xfrm>
-            <a:off x="914400" y="1371600"/>
-            <a:ext cx="10058400" cy="5029200"/>
+            <a:off x="457200" y="1097280"/>
+            <a:ext cx="10972800" cy="5029200"/>
           </a:xfrm>
           <a:prstGeom prst="rect">
             <a:avLst/>
@@ -3435,15 +3410,18 @@
           <a:p/>
           <a:p>
             <a:r>
-              <a:rPr sz="1400">
+              <a:rPr sz="1200">
                 <a:solidFill>
                   <a:srgbClr val="000000"/>
                 </a:solidFill>
               </a:rPr>
-              <a:t>int find(int x) {
-    if (p[x] != x) p[x] = find(p[x]);
-    return p[x];
-}</a:t>
+              <a:t># 并查集
+def find(x):
+    if p[x] != x:
+        p[x] = find(p[x])
+    return p[x]
+def merge(a, b):
+    p[find(a)] = find(b)</a:t>
             </a:r>
           </a:p>
         </p:txBody>
@@ -3474,8 +3452,8 @@
         </p:nvSpPr>
         <p:spPr>
           <a:xfrm>
-            <a:off x="914400" y="457200"/>
-            <a:ext cx="10058400" cy="914400"/>
+            <a:off x="457200" y="274320"/>
+            <a:ext cx="10972800" cy="731520"/>
           </a:xfrm>
           <a:prstGeom prst="rect">
             <a:avLst/>
@@ -3489,12 +3467,12 @@
           <a:lstStyle/>
           <a:p>
             <a:r>
-              <a:rPr sz="2800" b="1">
+              <a:rPr sz="2400" b="1">
                 <a:solidFill>
                   <a:srgbClr val="8B0000"/>
                 </a:solidFill>
               </a:rPr>
-              <a:t>Python 代码示例</a:t>
+              <a:t>常见错误</a:t>
             </a:r>
           </a:p>
         </p:txBody>
@@ -3507,8 +3485,8 @@
         </p:nvSpPr>
         <p:spPr>
           <a:xfrm>
-            <a:off x="914400" y="1371600"/>
-            <a:ext cx="10058400" cy="5029200"/>
+            <a:off x="457200" y="1097280"/>
+            <a:ext cx="10972800" cy="5029200"/>
           </a:xfrm>
           <a:prstGeom prst="rect">
             <a:avLst/>
@@ -3528,10 +3506,37 @@
                   <a:srgbClr val="000000"/>
                 </a:solidFill>
               </a:rPr>
-              <a:t>def find(x):
-    if p[x] != x:
-        p[x] = find(p[x])
-    return p[x]</a:t>
+              <a:t>单调栈忘记处理栈空的情况</a:t>
+            </a:r>
+          </a:p>
+          <a:p>
+            <a:r>
+              <a:rPr sz="1400">
+                <a:solidFill>
+                  <a:srgbClr val="000000"/>
+                </a:solidFill>
+              </a:rPr>
+              <a:t>KMP的next数组初始化：next[0]=-1</a:t>
+            </a:r>
+          </a:p>
+          <a:p>
+            <a:r>
+              <a:rPr sz="1400">
+                <a:solidFill>
+                  <a:srgbClr val="000000"/>
+                </a:solidFill>
+              </a:rPr>
+              <a:t>堆的下标从1还是0开始？C++STL从0，手写从1</a:t>
+            </a:r>
+          </a:p>
+          <a:p>
+            <a:r>
+              <a:rPr sz="1400">
+                <a:solidFill>
+                  <a:srgbClr val="000000"/>
+                </a:solidFill>
+              </a:rPr>
+              <a:t>并查集路径压缩必须在find中做</a:t>
             </a:r>
           </a:p>
         </p:txBody>
@@ -3562,8 +3567,8 @@
         </p:nvSpPr>
         <p:spPr>
           <a:xfrm>
-            <a:off x="914400" y="457200"/>
-            <a:ext cx="10058400" cy="914400"/>
+            <a:off x="457200" y="274320"/>
+            <a:ext cx="10972800" cy="731520"/>
           </a:xfrm>
           <a:prstGeom prst="rect">
             <a:avLst/>
@@ -3577,12 +3582,12 @@
           <a:lstStyle/>
           <a:p>
             <a:r>
-              <a:rPr sz="2800" b="1">
+              <a:rPr sz="2400" b="1">
                 <a:solidFill>
                   <a:srgbClr val="8B0000"/>
                 </a:solidFill>
               </a:rPr>
-              <a:t>常见错误</a:t>
+              <a:t>练习题目</a:t>
             </a:r>
           </a:p>
         </p:txBody>
@@ -3595,8 +3600,8 @@
         </p:nvSpPr>
         <p:spPr>
           <a:xfrm>
-            <a:off x="914400" y="1371600"/>
-            <a:ext cx="10058400" cy="5029200"/>
+            <a:off x="457200" y="1097280"/>
+            <a:ext cx="10972800" cy="5029200"/>
           </a:xfrm>
           <a:prstGeom prst="rect">
             <a:avLst/>
@@ -3611,42 +3616,32 @@
           <a:p/>
           <a:p>
             <a:r>
-              <a:rPr sz="1600">
+              <a:rPr sz="1400">
                 <a:solidFill>
                   <a:srgbClr val="000000"/>
                 </a:solidFill>
               </a:rPr>
-              <a:t>单调栈忘记处理栈空的情况</a:t>
-            </a:r>
-          </a:p>
-          <a:p>
-            <a:r>
-              <a:rPr sz="1600">
+              <a:t>JD130 铁链串珠 - 单链表 (Easy)</a:t>
+            </a:r>
+          </a:p>
+          <a:p>
+            <a:r>
+              <a:rPr sz="1400">
                 <a:solidFill>
                   <a:srgbClr val="000000"/>
                 </a:solidFill>
               </a:rPr>
-              <a:t>KMP的next数组初始化</a:t>
-            </a:r>
-          </a:p>
-          <a:p>
-            <a:r>
-              <a:rPr sz="1600">
+              <a:t>JD134 一山更比 - 单调栈 (Hard)</a:t>
+            </a:r>
+          </a:p>
+          <a:p>
+            <a:r>
+              <a:rPr sz="1400">
                 <a:solidFill>
                   <a:srgbClr val="000000"/>
                 </a:solidFill>
               </a:rPr>
-              <a:t>堆的下标从1还是0开始</a:t>
-            </a:r>
-          </a:p>
-          <a:p>
-            <a:r>
-              <a:rPr sz="1600">
-                <a:solidFill>
-                  <a:srgbClr val="000000"/>
-                </a:solidFill>
-              </a:rPr>
-              <a:t>并查集路径压缩</a:t>
+              <a:t>JD138 合帮并派 - 并查集 (Medium)</a:t>
             </a:r>
           </a:p>
         </p:txBody>
@@ -3677,8 +3672,8 @@
         </p:nvSpPr>
         <p:spPr>
           <a:xfrm>
-            <a:off x="914400" y="457200"/>
-            <a:ext cx="10058400" cy="914400"/>
+            <a:off x="457200" y="274320"/>
+            <a:ext cx="10972800" cy="731520"/>
           </a:xfrm>
           <a:prstGeom prst="rect">
             <a:avLst/>
@@ -3692,12 +3687,12 @@
           <a:lstStyle/>
           <a:p>
             <a:r>
-              <a:rPr sz="2800" b="1">
+              <a:rPr sz="2400" b="1">
                 <a:solidFill>
                   <a:srgbClr val="8B0000"/>
                 </a:solidFill>
               </a:rPr>
-              <a:t>练习题目</a:t>
+              <a:t>本章小结</a:t>
             </a:r>
           </a:p>
         </p:txBody>
@@ -3710,8 +3705,8 @@
         </p:nvSpPr>
         <p:spPr>
           <a:xfrm>
-            <a:off x="914400" y="1371600"/>
-            <a:ext cx="10058400" cy="5029200"/>
+            <a:off x="457200" y="1097280"/>
+            <a:ext cx="10972800" cy="5029200"/>
           </a:xfrm>
           <a:prstGeom prst="rect">
             <a:avLst/>
@@ -3726,147 +3721,42 @@
           <a:p/>
           <a:p>
             <a:r>
-              <a:rPr sz="1600">
+              <a:rPr sz="1400">
                 <a:solidFill>
                   <a:srgbClr val="000000"/>
                 </a:solidFill>
               </a:rPr>
-              <a:t>JD130 铁链串珠</a:t>
-            </a:r>
-          </a:p>
-          <a:p>
-            <a:r>
-              <a:rPr sz="1600">
+              <a:t>本章学习了第12章的核心概念</a:t>
+            </a:r>
+          </a:p>
+          <a:p>
+            <a:r>
+              <a:rPr sz="1400">
                 <a:solidFill>
                   <a:srgbClr val="000000"/>
                 </a:solidFill>
               </a:rPr>
-              <a:t>JD134 一山更比</a:t>
-            </a:r>
-          </a:p>
-          <a:p>
-            <a:r>
-              <a:rPr sz="1600">
+              <a:t>多做练习是掌握算法的关键</a:t>
+            </a:r>
+          </a:p>
+          <a:p>
+            <a:r>
+              <a:rPr sz="1400">
                 <a:solidFill>
                   <a:srgbClr val="000000"/>
                 </a:solidFill>
               </a:rPr>
-              <a:t>JD138 合帮并派</a:t>
-            </a:r>
-          </a:p>
-        </p:txBody>
-      </p:sp>
-    </p:spTree>
-  </p:cSld>
-  <p:clrMapOvr>
-    <a:masterClrMapping/>
-  </p:clrMapOvr>
-</p:sld>
-</file>
-
-<file path=ppt/slides/slide8.xml><?xml version="1.0" encoding="utf-8"?>
-<p:sld xmlns:a="http://schemas.openxmlformats.org/drawingml/2006/main" xmlns:p="http://schemas.openxmlformats.org/presentationml/2006/main" xmlns:r="http://schemas.openxmlformats.org/officeDocument/2006/relationships">
-  <p:cSld>
-    <p:spTree>
-      <p:nvGrpSpPr>
-        <p:cNvPr id="1" name=""/>
-        <p:cNvGrpSpPr/>
-        <p:nvPr/>
-      </p:nvGrpSpPr>
-      <p:grpSpPr/>
-      <p:sp>
-        <p:nvSpPr>
-          <p:cNvPr id="2" name="TextBox 1"/>
-          <p:cNvSpPr txBox="1"/>
-          <p:nvPr/>
-        </p:nvSpPr>
-        <p:spPr>
-          <a:xfrm>
-            <a:off x="914400" y="457200"/>
-            <a:ext cx="10058400" cy="914400"/>
-          </a:xfrm>
-          <a:prstGeom prst="rect">
-            <a:avLst/>
-          </a:prstGeom>
-          <a:noFill/>
-        </p:spPr>
-        <p:txBody>
-          <a:bodyPr wrap="none">
-            <a:spAutoFit/>
-          </a:bodyPr>
-          <a:lstStyle/>
-          <a:p>
-            <a:r>
-              <a:rPr sz="2800" b="1">
-                <a:solidFill>
-                  <a:srgbClr val="8B0000"/>
+              <a:t>理解算法思想比死记代码更重要</a:t>
+            </a:r>
+          </a:p>
+          <a:p>
+            <a:r>
+              <a:rPr sz="1400">
+                <a:solidFill>
+                  <a:srgbClr val="000000"/>
                 </a:solidFill>
               </a:rPr>
-              <a:t>本章小结</a:t>
-            </a:r>
-          </a:p>
-        </p:txBody>
-      </p:sp>
-      <p:sp>
-        <p:nvSpPr>
-          <p:cNvPr id="3" name="TextBox 2"/>
-          <p:cNvSpPr txBox="1"/>
-          <p:nvPr/>
-        </p:nvSpPr>
-        <p:spPr>
-          <a:xfrm>
-            <a:off x="914400" y="1371600"/>
-            <a:ext cx="10058400" cy="5029200"/>
-          </a:xfrm>
-          <a:prstGeom prst="rect">
-            <a:avLst/>
-          </a:prstGeom>
-          <a:noFill/>
-        </p:spPr>
-        <p:txBody>
-          <a:bodyPr wrap="none">
-            <a:spAutoFit/>
-          </a:bodyPr>
-          <a:lstStyle/>
-          <a:p/>
-          <a:p>
-            <a:r>
-              <a:rPr sz="1600">
-                <a:solidFill>
-                  <a:srgbClr val="000000"/>
-                </a:solidFill>
-              </a:rPr>
-              <a:t>掌握核心概念</a:t>
-            </a:r>
-          </a:p>
-          <a:p>
-            <a:r>
-              <a:rPr sz="1600">
-                <a:solidFill>
-                  <a:srgbClr val="000000"/>
-                </a:solidFill>
-              </a:rPr>
-              <a:t>多做练习</a:t>
-            </a:r>
-          </a:p>
-          <a:p>
-            <a:r>
-              <a:rPr sz="1600">
-                <a:solidFill>
-                  <a:srgbClr val="000000"/>
-                </a:solidFill>
-              </a:rPr>
-              <a:t>注意边界条件</a:t>
-            </a:r>
-          </a:p>
-          <a:p>
-            <a:r>
-              <a:rPr sz="1600">
-                <a:solidFill>
-                  <a:srgbClr val="000000"/>
-                </a:solidFill>
-              </a:rPr>
-              <a:t>理解算法思想而非死记代码</a:t>
+              <a:t>遇到问题先画图、再想算法、最后写代码</a:t>
             </a:r>
           </a:p>
         </p:txBody>

--- a/textbook/ppt/chapter12_ppt.pptx
+++ b/textbook/ppt/chapter12_ppt.pptx
@@ -12,6 +12,7 @@
     <p:sldId id="260" r:id="rId11"/>
     <p:sldId id="261" r:id="rId12"/>
     <p:sldId id="262" r:id="rId13"/>
+    <p:sldId id="263" r:id="rId14"/>
   </p:sldIdLst>
   <p:sldSz cx="12188952" cy="6858000" type="screen4x3"/>
   <p:notesSz cx="6858000" cy="9144000"/>
@@ -3757,6 +3758,91 @@
                 </a:solidFill>
               </a:rPr>
               <a:t>遇到问题先画图、再想算法、最后写代码</a:t>
+            </a:r>
+          </a:p>
+        </p:txBody>
+      </p:sp>
+    </p:spTree>
+  </p:cSld>
+  <p:clrMapOvr>
+    <a:masterClrMapping/>
+  </p:clrMapOvr>
+</p:sld>
+</file>
+
+<file path=ppt/slides/slide8.xml><?xml version="1.0" encoding="utf-8"?>
+<p:sld xmlns:a="http://schemas.openxmlformats.org/drawingml/2006/main" xmlns:p="http://schemas.openxmlformats.org/presentationml/2006/main" xmlns:r="http://schemas.openxmlformats.org/officeDocument/2006/relationships">
+  <p:cSld>
+    <p:spTree>
+      <p:nvGrpSpPr>
+        <p:cNvPr id="1" name=""/>
+        <p:cNvGrpSpPr/>
+        <p:nvPr/>
+      </p:nvGrpSpPr>
+      <p:grpSpPr/>
+      <p:sp>
+        <p:nvSpPr>
+          <p:cNvPr id="2" name="TextBox 1"/>
+          <p:cNvSpPr txBox="1"/>
+          <p:nvPr/>
+        </p:nvSpPr>
+        <p:spPr>
+          <a:xfrm>
+            <a:off x="457200" y="274320"/>
+            <a:ext cx="10972800" cy="731520"/>
+          </a:xfrm>
+          <a:prstGeom prst="rect">
+            <a:avLst/>
+          </a:prstGeom>
+          <a:noFill/>
+        </p:spPr>
+        <p:txBody>
+          <a:bodyPr wrap="none">
+            <a:spAutoFit/>
+          </a:bodyPr>
+          <a:lstStyle/>
+          <a:p>
+            <a:r>
+              <a:rPr sz="2400" b="1">
+                <a:solidFill>
+                  <a:srgbClr val="8B0000"/>
+                </a:solidFill>
+              </a:rPr>
+              <a:t>本章概览</a:t>
+            </a:r>
+          </a:p>
+        </p:txBody>
+      </p:sp>
+      <p:sp>
+        <p:nvSpPr>
+          <p:cNvPr id="3" name="TextBox 2"/>
+          <p:cNvSpPr txBox="1"/>
+          <p:nvPr/>
+        </p:nvSpPr>
+        <p:spPr>
+          <a:xfrm>
+            <a:off x="457200" y="1097280"/>
+            <a:ext cx="10972800" cy="5029200"/>
+          </a:xfrm>
+          <a:prstGeom prst="rect">
+            <a:avLst/>
+          </a:prstGeom>
+          <a:noFill/>
+        </p:spPr>
+        <p:txBody>
+          <a:bodyPr wrap="none">
+            <a:spAutoFit/>
+          </a:bodyPr>
+          <a:lstStyle/>
+          <a:p/>
+          <a:p>
+            <a:r>
+              <a:rPr sz="1600">
+                <a:solidFill>
+                  <a:srgbClr val="000000"/>
+                </a:solidFill>
+              </a:rPr>
+              <a:t>本章学习进阶数据结构——单调栈、单调队列、KMP、堆、并查集。</a:t>
             </a:r>
           </a:p>
         </p:txBody>

--- a/textbook/ppt/chapter12_ppt.pptx
+++ b/textbook/ppt/chapter12_ppt.pptx
@@ -13,6 +13,7 @@
     <p:sldId id="261" r:id="rId12"/>
     <p:sldId id="262" r:id="rId13"/>
     <p:sldId id="263" r:id="rId14"/>
+    <p:sldId id="264" r:id="rId15"/>
   </p:sldIdLst>
   <p:sldSz cx="12188952" cy="6858000" type="screen4x3"/>
   <p:notesSz cx="6858000" cy="9144000"/>
@@ -3727,7 +3728,7 @@
                   <a:srgbClr val="000000"/>
                 </a:solidFill>
               </a:rPr>
-              <a:t>本章学习了第12章的核心概念</a:t>
+              <a:t/>
             </a:r>
           </a:p>
           <a:p>
@@ -3737,7 +3738,7 @@
                   <a:srgbClr val="000000"/>
                 </a:solidFill>
               </a:rPr>
-              <a:t>多做练习是掌握算法的关键</a:t>
+              <a:t/>
             </a:r>
           </a:p>
           <a:p>
@@ -3747,7 +3748,7 @@
                   <a:srgbClr val="000000"/>
                 </a:solidFill>
               </a:rPr>
-              <a:t>理解算法思想比死记代码更重要</a:t>
+              <a:t/>
             </a:r>
           </a:p>
           <a:p>
@@ -3757,7 +3758,7 @@
                   <a:srgbClr val="000000"/>
                 </a:solidFill>
               </a:rPr>
-              <a:t>遇到问题先画图、再想算法、最后写代码</a:t>
+              <a:t/>
             </a:r>
           </a:p>
         </p:txBody>
@@ -3843,6 +3844,121 @@
                 </a:solidFill>
               </a:rPr>
               <a:t>本章学习进阶数据结构——单调栈、单调队列、KMP、堆、并查集。</a:t>
+            </a:r>
+          </a:p>
+        </p:txBody>
+      </p:sp>
+    </p:spTree>
+  </p:cSld>
+  <p:clrMapOvr>
+    <a:masterClrMapping/>
+  </p:clrMapOvr>
+</p:sld>
+</file>
+
+<file path=ppt/slides/slide9.xml><?xml version="1.0" encoding="utf-8"?>
+<p:sld xmlns:a="http://schemas.openxmlformats.org/drawingml/2006/main" xmlns:p="http://schemas.openxmlformats.org/presentationml/2006/main" xmlns:r="http://schemas.openxmlformats.org/officeDocument/2006/relationships">
+  <p:cSld>
+    <p:spTree>
+      <p:nvGrpSpPr>
+        <p:cNvPr id="1" name=""/>
+        <p:cNvGrpSpPr/>
+        <p:nvPr/>
+      </p:nvGrpSpPr>
+      <p:grpSpPr/>
+      <p:sp>
+        <p:nvSpPr>
+          <p:cNvPr id="2" name="TextBox 1"/>
+          <p:cNvSpPr txBox="1"/>
+          <p:nvPr/>
+        </p:nvSpPr>
+        <p:spPr>
+          <a:xfrm>
+            <a:off x="457200" y="274320"/>
+            <a:ext cx="10972800" cy="731520"/>
+          </a:xfrm>
+          <a:prstGeom prst="rect">
+            <a:avLst/>
+          </a:prstGeom>
+          <a:noFill/>
+        </p:spPr>
+        <p:txBody>
+          <a:bodyPr wrap="none">
+            <a:spAutoFit/>
+          </a:bodyPr>
+          <a:lstStyle/>
+          <a:p>
+            <a:r>
+              <a:rPr sz="2400" b="1">
+                <a:solidFill>
+                  <a:srgbClr val="8B0000"/>
+                </a:solidFill>
+              </a:rPr>
+              <a:t>第12章 核心要点</a:t>
+            </a:r>
+          </a:p>
+        </p:txBody>
+      </p:sp>
+      <p:sp>
+        <p:nvSpPr>
+          <p:cNvPr id="3" name="TextBox 2"/>
+          <p:cNvSpPr txBox="1"/>
+          <p:nvPr/>
+        </p:nvSpPr>
+        <p:spPr>
+          <a:xfrm>
+            <a:off x="457200" y="1097280"/>
+            <a:ext cx="10972800" cy="5029200"/>
+          </a:xfrm>
+          <a:prstGeom prst="rect">
+            <a:avLst/>
+          </a:prstGeom>
+          <a:noFill/>
+        </p:spPr>
+        <p:txBody>
+          <a:bodyPr wrap="none">
+            <a:spAutoFit/>
+          </a:bodyPr>
+          <a:lstStyle/>
+          <a:p/>
+          <a:p>
+            <a:r>
+              <a:rPr sz="1600">
+                <a:solidFill>
+                  <a:srgbClr val="000000"/>
+                </a:solidFill>
+              </a:rPr>
+              <a:t>• 单调栈：找第一个更大/更小元素</a:t>
+            </a:r>
+          </a:p>
+          <a:p>
+            <a:r>
+              <a:rPr sz="1600">
+                <a:solidFill>
+                  <a:srgbClr val="000000"/>
+                </a:solidFill>
+              </a:rPr>
+              <a:t>• 并查集：合并集合+查询连通</a:t>
+            </a:r>
+          </a:p>
+          <a:p>
+            <a:r>
+              <a:rPr sz="1600">
+                <a:solidFill>
+                  <a:srgbClr val="000000"/>
+                </a:solidFill>
+              </a:rPr>
+              <a:t>• KMP 的 next 数组</a:t>
+            </a:r>
+          </a:p>
+          <a:p>
+            <a:r>
+              <a:rPr sz="1600">
+                <a:solidFill>
+                  <a:srgbClr val="000000"/>
+                </a:solidFill>
+              </a:rPr>
+              <a:t>• 堆的插入和删除操作</a:t>
             </a:r>
           </a:p>
         </p:txBody>
